--- a/test-corpus/word-verification/smartart-cycle-recheck.pptx
+++ b/test-corpus/word-verification/smartart-cycle-recheck.pptx
@@ -144,7 +144,7 @@
         </p:nvSpPr>
         <p:spPr>
           <a:xfrm>
-            <a:off x="5851814" y="1028700"/>
+            <a:off x="3730406" y="1028700"/>
             <a:ext cx="976745" cy="1046513"/>
           </a:xfrm>
           <a:prstGeom prst="rect">
@@ -212,7 +212,7 @@
         </p:nvSpPr>
         <p:spPr>
           <a:xfrm>
-            <a:off x="5328557" y="3191494"/>
+            <a:off x="3207149" y="3191494"/>
             <a:ext cx="976745" cy="1046513"/>
           </a:xfrm>
           <a:prstGeom prst="rect">
@@ -280,7 +280,7 @@
         </p:nvSpPr>
         <p:spPr>
           <a:xfrm>
-            <a:off x="5851814" y="5354287"/>
+            <a:off x="3730406" y="5354287"/>
             <a:ext cx="976745" cy="1046513"/>
           </a:xfrm>
           <a:prstGeom prst="rect">
@@ -351,7 +351,7 @@
         </p:nvCxnSpPr>
         <p:spPr>
           <a:xfrm flipH="1">
-            <a:off x="5816930" y="2075213"/>
+            <a:off x="3695522" y="2075213"/>
             <a:ext cx="523257" cy="1116281"/>
           </a:xfrm>
           <a:prstGeom prst="line">
@@ -391,7 +391,7 @@
         </p:nvCxnSpPr>
         <p:spPr>
           <a:xfrm>
-            <a:off x="5816930" y="4238006"/>
+            <a:off x="3695522" y="4238006"/>
             <a:ext cx="523257" cy="1116281"/>
           </a:xfrm>
           <a:prstGeom prst="line">
@@ -431,7 +431,7 @@
         </p:nvCxnSpPr>
         <p:spPr>
           <a:xfrm flipV="1">
-            <a:off x="6340187" y="2075213"/>
+            <a:off x="4218779" y="2075213"/>
             <a:ext cx="0" cy="3279074"/>
           </a:xfrm>
           <a:prstGeom prst="line">
@@ -460,6 +460,62 @@
           </a:fontRef>
         </p:style>
       </p:cxnSp>
+      <p:sp>
+        <p:nvSpPr>
+          <p:cNvPr id="4" name="Mermaid source"/>
+          <p:cNvSpPr/>
+          <p:nvPr/>
+        </p:nvSpPr>
+        <p:spPr>
+          <a:xfrm>
+            <a:off x="7674864" y="1028700"/>
+            <a:ext cx="4059936" cy="5372100"/>
+          </a:xfrm>
+          <a:prstGeom prst="rect">
+            <a:avLst/>
+          </a:prstGeom>
+          <a:solidFill>
+            <a:srgbClr val="F3F4F6"/>
+          </a:solidFill>
+          <a:ln w="9525">
+            <a:solidFill>
+              <a:srgbClr val="D1D5DB"/>
+            </a:solidFill>
+          </a:ln>
+        </p:spPr>
+        <p:txBody>
+          <a:bodyPr wrap="square" lIns="91440" tIns="45720" rIns="91440" bIns="45720" anchor="t">
+            <a:noAutofit/>
+          </a:bodyPr>
+          <a:lstStyle/>
+          <a:p>
+            <a:pPr algn="l"/>
+            <a:r>
+              <a:rPr lang="en-US" sz="1400" dirty="0">
+                <a:solidFill>
+                  <a:srgbClr val="1F2937"/>
+                </a:solidFill>
+                <a:latin typeface="Consolas"/>
+                <a:cs typeface="Consolas"/>
+              </a:rPr>
+              <a:t>graph TD</a:t>
+            </a:r>
+          </a:p>
+          <a:p>
+            <a:pPr algn="l"/>
+            <a:r>
+              <a:rPr lang="en-US" sz="1400" dirty="0">
+                <a:solidFill>
+                  <a:srgbClr val="1F2937"/>
+                </a:solidFill>
+                <a:latin typeface="Consolas"/>
+                <a:cs typeface="Consolas"/>
+              </a:rPr>
+              <a:t>  A --&gt; B --&gt; C --&gt; A</a:t>
+            </a:r>
+          </a:p>
+        </p:txBody>
+      </p:sp>
     </p:spTree>
   </p:cSld>
   <p:clrMapOvr>
